--- a/outsystems/niveau-2/deel-17/slidedeck.pptx
+++ b/outsystems/niveau-2/deel-17/slidedeck.pptx
@@ -3213,8 +3213,8 @@
         </p:nvSpPr>
         <p:spPr>
           <a:xfrm>
-            <a:off x="640080" y="548640"/>
-            <a:ext cx="10881360" cy="914400"/>
+            <a:off x="640080" y="457200"/>
+            <a:ext cx="10881360" cy="822960"/>
           </a:xfrm>
           <a:prstGeom prst="rect">
             <a:avLst/>
@@ -3333,8 +3333,8 @@
         </p:nvSpPr>
         <p:spPr>
           <a:xfrm>
-            <a:off x="640080" y="548640"/>
-            <a:ext cx="10881360" cy="914400"/>
+            <a:off x="640080" y="457200"/>
+            <a:ext cx="10881360" cy="822960"/>
           </a:xfrm>
           <a:prstGeom prst="rect">
             <a:avLst/>
@@ -3561,8 +3561,8 @@
         </p:nvSpPr>
         <p:spPr>
           <a:xfrm>
-            <a:off x="640080" y="548640"/>
-            <a:ext cx="10881360" cy="914400"/>
+            <a:off x="640080" y="457200"/>
+            <a:ext cx="10881360" cy="822960"/>
           </a:xfrm>
           <a:prstGeom prst="rect">
             <a:avLst/>
@@ -3754,8 +3754,8 @@
         </p:nvSpPr>
         <p:spPr>
           <a:xfrm>
-            <a:off x="640080" y="548640"/>
-            <a:ext cx="10881360" cy="914400"/>
+            <a:off x="640080" y="457200"/>
+            <a:ext cx="10881360" cy="822960"/>
           </a:xfrm>
           <a:prstGeom prst="rect">
             <a:avLst/>
@@ -3935,8 +3935,8 @@
         </p:nvSpPr>
         <p:spPr>
           <a:xfrm>
-            <a:off x="640080" y="457200"/>
-            <a:ext cx="10881360" cy="731520"/>
+            <a:off x="640080" y="365760"/>
+            <a:ext cx="10881360" cy="640080"/>
           </a:xfrm>
           <a:prstGeom prst="rect">
             <a:avLst/>
@@ -3951,7 +3951,7 @@
           <a:p>
             <a:pPr algn="l"/>
             <a:r>
-              <a:rPr sz="2600" b="1">
+              <a:rPr sz="2400" b="1">
                 <a:solidFill>
                   <a:srgbClr val="14213D"/>
                 </a:solidFill>
@@ -3971,8 +3971,8 @@
           <p:nvPr/>
         </p:nvGraphicFramePr>
         <p:xfrm>
-          <a:off x="640080" y="1371600"/>
-          <a:ext cx="10881360" cy="2194560"/>
+          <a:off x="640080" y="1097280"/>
+          <a:ext cx="10881360" cy="1828800"/>
         </p:xfrm>
         <a:graphic>
           <a:graphicData uri="http://schemas.openxmlformats.org/drawingml/2006/table">
@@ -3984,14 +3984,14 @@
                 <a:gridCol w="5440680"/>
                 <a:gridCol w="5440680"/>
               </a:tblGrid>
-              <a:tr h="548640">
+              <a:tr h="457200">
                 <a:tc>
                   <a:txBody>
                     <a:bodyPr/>
                     <a:lstStyle/>
                     <a:p>
                       <a:r>
-                        <a:rPr sz="1600" b="1"/>
+                        <a:rPr sz="1400" b="1"/>
                         <a:t>Risico</a:t>
                       </a:r>
                     </a:p>
@@ -4004,7 +4004,7 @@
                     <a:lstStyle/>
                     <a:p>
                       <a:r>
-                        <a:rPr sz="1600" b="1"/>
+                        <a:rPr sz="1400" b="1"/>
                         <a:t>Wie lost het op</a:t>
                       </a:r>
                     </a:p>
@@ -4012,14 +4012,14 @@
                   <a:tcPr/>
                 </a:tc>
               </a:tr>
-              <a:tr h="548640">
+              <a:tr h="457200">
                 <a:tc>
                   <a:txBody>
                     <a:bodyPr/>
                     <a:lstStyle/>
                     <a:p>
                       <a:r>
-                        <a:rPr sz="1600"/>
+                        <a:rPr sz="1400"/>
                         <a:t>SQL-injectie via Aggregate</a:t>
                       </a:r>
                     </a:p>
@@ -4032,7 +4032,7 @@
                     <a:lstStyle/>
                     <a:p>
                       <a:r>
-                        <a:rPr sz="1600"/>
+                        <a:rPr sz="1400"/>
                         <a:t>Platform (automatische escaping)</a:t>
                       </a:r>
                     </a:p>
@@ -4040,14 +4040,14 @@
                   <a:tcPr/>
                 </a:tc>
               </a:tr>
-              <a:tr h="548640">
+              <a:tr h="457200">
                 <a:tc>
                   <a:txBody>
                     <a:bodyPr/>
                     <a:lstStyle/>
                     <a:p>
                       <a:r>
-                        <a:rPr sz="1600"/>
+                        <a:rPr sz="1400"/>
                         <a:t>Broken access control</a:t>
                       </a:r>
                     </a:p>
@@ -4060,7 +4060,7 @@
                     <a:lstStyle/>
                     <a:p>
                       <a:r>
-                        <a:rPr sz="1600"/>
+                        <a:rPr sz="1400"/>
                         <a:t>Jij (deel 8: scherm + datafilter)</a:t>
                       </a:r>
                     </a:p>
@@ -4068,14 +4068,14 @@
                   <a:tcPr/>
                 </a:tc>
               </a:tr>
-              <a:tr h="548640">
+              <a:tr h="457200">
                 <a:tc>
                   <a:txBody>
                     <a:bodyPr/>
                     <a:lstStyle/>
                     <a:p>
                       <a:r>
-                        <a:rPr sz="1600"/>
+                        <a:rPr sz="1400"/>
                         <a:t>Security misconfiguration</a:t>
                       </a:r>
                     </a:p>
@@ -4088,7 +4088,7 @@
                     <a:lstStyle/>
                     <a:p>
                       <a:r>
-                        <a:rPr sz="1600"/>
+                        <a:rPr sz="1400"/>
                         <a:t>Jij (bijv. vergeten rolkoppeling)</a:t>
                       </a:r>
                     </a:p>
@@ -4303,8 +4303,8 @@
         </p:nvSpPr>
         <p:spPr>
           <a:xfrm>
-            <a:off x="640080" y="457200"/>
-            <a:ext cx="10881360" cy="731520"/>
+            <a:off x="640080" y="365760"/>
+            <a:ext cx="10881360" cy="640080"/>
           </a:xfrm>
           <a:prstGeom prst="rect">
             <a:avLst/>
@@ -4319,7 +4319,7 @@
           <a:p>
             <a:pPr algn="l"/>
             <a:r>
-              <a:rPr sz="2600" b="1">
+              <a:rPr sz="2400" b="1">
                 <a:solidFill>
                   <a:srgbClr val="14213D"/>
                 </a:solidFill>
@@ -4339,8 +4339,8 @@
           <p:nvPr/>
         </p:nvGraphicFramePr>
         <p:xfrm>
-          <a:off x="640080" y="1371600"/>
-          <a:ext cx="10881360" cy="1645919"/>
+          <a:off x="640080" y="1097280"/>
+          <a:ext cx="10881360" cy="1371600"/>
         </p:xfrm>
         <a:graphic>
           <a:graphicData uri="http://schemas.openxmlformats.org/drawingml/2006/table">
@@ -4353,7 +4353,7 @@
                 <a:gridCol w="3627120"/>
                 <a:gridCol w="3627120"/>
               </a:tblGrid>
-              <a:tr h="548639">
+              <a:tr h="457200">
                 <a:tc>
                   <a:txBody>
                     <a:bodyPr/>
@@ -4368,7 +4368,7 @@
                     <a:lstStyle/>
                     <a:p>
                       <a:r>
-                        <a:rPr sz="1600" b="1"/>
+                        <a:rPr sz="1400" b="1"/>
                         <a:t>O11</a:t>
                       </a:r>
                     </a:p>
@@ -4381,7 +4381,7 @@
                     <a:lstStyle/>
                     <a:p>
                       <a:r>
-                        <a:rPr sz="1600" b="1"/>
+                        <a:rPr sz="1400" b="1"/>
                         <a:t>ODC</a:t>
                       </a:r>
                     </a:p>
@@ -4389,14 +4389,14 @@
                   <a:tcPr/>
                 </a:tc>
               </a:tr>
-              <a:tr h="548639">
+              <a:tr h="457200">
                 <a:tc>
                   <a:txBody>
                     <a:bodyPr/>
                     <a:lstStyle/>
                     <a:p>
                       <a:r>
-                        <a:rPr sz="1600"/>
+                        <a:rPr sz="1400"/>
                         <a:t>Uitgangspunt</a:t>
                       </a:r>
                     </a:p>
@@ -4409,7 +4409,7 @@
                     <a:lstStyle/>
                     <a:p>
                       <a:r>
-                        <a:rPr sz="1600"/>
+                        <a:rPr sz="1400"/>
                         <a:t>Native IT Users</a:t>
                       </a:r>
                     </a:p>
@@ -4422,7 +4422,7 @@
                     <a:lstStyle/>
                     <a:p>
                       <a:r>
-                        <a:rPr sz="1600"/>
+                        <a:rPr sz="1400"/>
                         <a:t>IAM-first</a:t>
                       </a:r>
                     </a:p>
@@ -4430,14 +4430,14 @@
                   <a:tcPr/>
                 </a:tc>
               </a:tr>
-              <a:tr h="548641">
+              <a:tr h="457200">
                 <a:tc>
                   <a:txBody>
                     <a:bodyPr/>
                     <a:lstStyle/>
                     <a:p>
                       <a:r>
-                        <a:rPr sz="1600"/>
+                        <a:rPr sz="1400"/>
                         <a:t>SSO-configuratie</a:t>
                       </a:r>
                     </a:p>
@@ -4450,7 +4450,7 @@
                     <a:lstStyle/>
                     <a:p>
                       <a:r>
-                        <a:rPr sz="1600"/>
+                        <a:rPr sz="1400"/>
                         <a:t>Aparte, bewuste stap</a:t>
                       </a:r>
                     </a:p>
@@ -4463,7 +4463,7 @@
                     <a:lstStyle/>
                     <a:p>
                       <a:r>
-                        <a:rPr sz="1600"/>
+                        <a:rPr sz="1400"/>
                         <a:t>Natuurlijke uitbreiding</a:t>
                       </a:r>
                     </a:p>
@@ -4475,6 +4475,30 @@
           </a:graphicData>
         </a:graphic>
       </p:graphicFrame>
+      <p:pic>
+        <p:nvPicPr>
+          <p:cNvPr id="4" name="Picture 3" descr="figuur-17-1.png"/>
+          <p:cNvPicPr>
+            <a:picLocks noChangeAspect="1"/>
+          </p:cNvPicPr>
+          <p:nvPr/>
+        </p:nvPicPr>
+        <p:blipFill>
+          <a:blip r:embed="rId2"/>
+          <a:stretch>
+            <a:fillRect/>
+          </a:stretch>
+        </p:blipFill>
+        <p:spPr>
+          <a:xfrm>
+            <a:off x="2258060" y="2743200"/>
+            <a:ext cx="7645400" cy="3931920"/>
+          </a:xfrm>
+          <a:prstGeom prst="rect">
+            <a:avLst/>
+          </a:prstGeom>
+        </p:spPr>
+      </p:pic>
     </p:spTree>
   </p:cSld>
   <p:clrMapOvr>
